--- a/01_FoundationProjects/MFL05_Accelerometer/MFL05_Accelerometer.pptx
+++ b/01_FoundationProjects/MFL05_Accelerometer/MFL05_Accelerometer.pptx
@@ -268,7 +268,7 @@
           <a:p>
             <a:fld id="{375049E3-AEF5-412D-9F98-5201579F9569}" type="datetimeFigureOut">
               <a:rPr lang="en-GB" smtClean="0"/>
-              <a:t>26/12/2025</a:t>
+              <a:t>18/01/2026</a:t>
             </a:fld>
             <a:endParaRPr lang="en-GB"/>
           </a:p>
@@ -468,7 +468,7 @@
           <a:p>
             <a:fld id="{375049E3-AEF5-412D-9F98-5201579F9569}" type="datetimeFigureOut">
               <a:rPr lang="en-GB" smtClean="0"/>
-              <a:t>26/12/2025</a:t>
+              <a:t>18/01/2026</a:t>
             </a:fld>
             <a:endParaRPr lang="en-GB"/>
           </a:p>
@@ -678,7 +678,7 @@
           <a:p>
             <a:fld id="{375049E3-AEF5-412D-9F98-5201579F9569}" type="datetimeFigureOut">
               <a:rPr lang="en-GB" smtClean="0"/>
-              <a:t>26/12/2025</a:t>
+              <a:t>18/01/2026</a:t>
             </a:fld>
             <a:endParaRPr lang="en-GB"/>
           </a:p>
@@ -878,7 +878,7 @@
           <a:p>
             <a:fld id="{375049E3-AEF5-412D-9F98-5201579F9569}" type="datetimeFigureOut">
               <a:rPr lang="en-GB" smtClean="0"/>
-              <a:t>26/12/2025</a:t>
+              <a:t>18/01/2026</a:t>
             </a:fld>
             <a:endParaRPr lang="en-GB"/>
           </a:p>
@@ -1154,7 +1154,7 @@
           <a:p>
             <a:fld id="{375049E3-AEF5-412D-9F98-5201579F9569}" type="datetimeFigureOut">
               <a:rPr lang="en-GB" smtClean="0"/>
-              <a:t>26/12/2025</a:t>
+              <a:t>18/01/2026</a:t>
             </a:fld>
             <a:endParaRPr lang="en-GB"/>
           </a:p>
@@ -1422,7 +1422,7 @@
           <a:p>
             <a:fld id="{375049E3-AEF5-412D-9F98-5201579F9569}" type="datetimeFigureOut">
               <a:rPr lang="en-GB" smtClean="0"/>
-              <a:t>26/12/2025</a:t>
+              <a:t>18/01/2026</a:t>
             </a:fld>
             <a:endParaRPr lang="en-GB"/>
           </a:p>
@@ -1837,7 +1837,7 @@
           <a:p>
             <a:fld id="{375049E3-AEF5-412D-9F98-5201579F9569}" type="datetimeFigureOut">
               <a:rPr lang="en-GB" smtClean="0"/>
-              <a:t>26/12/2025</a:t>
+              <a:t>18/01/2026</a:t>
             </a:fld>
             <a:endParaRPr lang="en-GB"/>
           </a:p>
@@ -1979,7 +1979,7 @@
           <a:p>
             <a:fld id="{375049E3-AEF5-412D-9F98-5201579F9569}" type="datetimeFigureOut">
               <a:rPr lang="en-GB" smtClean="0"/>
-              <a:t>26/12/2025</a:t>
+              <a:t>18/01/2026</a:t>
             </a:fld>
             <a:endParaRPr lang="en-GB"/>
           </a:p>
@@ -2092,7 +2092,7 @@
           <a:p>
             <a:fld id="{375049E3-AEF5-412D-9F98-5201579F9569}" type="datetimeFigureOut">
               <a:rPr lang="en-GB" smtClean="0"/>
-              <a:t>26/12/2025</a:t>
+              <a:t>18/01/2026</a:t>
             </a:fld>
             <a:endParaRPr lang="en-GB"/>
           </a:p>
@@ -2405,7 +2405,7 @@
           <a:p>
             <a:fld id="{375049E3-AEF5-412D-9F98-5201579F9569}" type="datetimeFigureOut">
               <a:rPr lang="en-GB" smtClean="0"/>
-              <a:t>26/12/2025</a:t>
+              <a:t>18/01/2026</a:t>
             </a:fld>
             <a:endParaRPr lang="en-GB"/>
           </a:p>
@@ -2694,7 +2694,7 @@
           <a:p>
             <a:fld id="{375049E3-AEF5-412D-9F98-5201579F9569}" type="datetimeFigureOut">
               <a:rPr lang="en-GB" smtClean="0"/>
-              <a:t>26/12/2025</a:t>
+              <a:t>18/01/2026</a:t>
             </a:fld>
             <a:endParaRPr lang="en-GB"/>
           </a:p>
@@ -2937,7 +2937,7 @@
           <a:p>
             <a:fld id="{375049E3-AEF5-412D-9F98-5201579F9569}" type="datetimeFigureOut">
               <a:rPr lang="en-GB" smtClean="0"/>
-              <a:t>26/12/2025</a:t>
+              <a:t>18/01/2026</a:t>
             </a:fld>
             <a:endParaRPr lang="en-GB"/>
           </a:p>
@@ -5191,7 +5191,7 @@
         <p:spPr>
           <a:xfrm>
             <a:off x="7031990" y="2445206"/>
-            <a:ext cx="4309253" cy="1200329"/>
+            <a:ext cx="4309253" cy="1477328"/>
           </a:xfrm>
           <a:prstGeom prst="rect">
             <a:avLst/>
@@ -5215,7 +5215,7 @@
               <a:rPr lang="en-GB" dirty="0">
                 <a:hlinkClick r:id="rId2"/>
               </a:rPr>
-              <a:t>https://github.com/info-zas/zas-robotics-motion/blob/main/01_FoundationProjects/MFL05/MFL05/MFL05.ino</a:t>
+              <a:t>https://github.com/info-zas/zas-robotics-motion/tree/main/01_FoundationProjects/MFL05_Accelerometer/MFL05_Accelerometer_MPU6050</a:t>
             </a:r>
             <a:endParaRPr lang="en-GB" dirty="0"/>
           </a:p>
@@ -5331,8 +5331,8 @@
         </p:nvSpPr>
         <p:spPr bwMode="auto">
           <a:xfrm>
-            <a:off x="6943591" y="1938100"/>
-            <a:ext cx="5599912" cy="369332"/>
+            <a:off x="6932440" y="1732646"/>
+            <a:ext cx="5599912" cy="646331"/>
           </a:xfrm>
           <a:prstGeom prst="rect">
             <a:avLst/>
@@ -5444,7 +5444,7 @@
             </a:pPr>
             <a:r>
               <a:rPr lang="en-GB" b="1" dirty="0"/>
-              <a:t>Code for Lesson MFL05 (MFL05.ino):</a:t>
+              <a:t>Code for Lesson MFL05 (MFL05_Accelerometer_MPU6050.ino):</a:t>
             </a:r>
           </a:p>
         </p:txBody>
@@ -5552,7 +5552,7 @@
         <p:spPr>
           <a:xfrm>
             <a:off x="606099" y="1542997"/>
-            <a:ext cx="6093994" cy="646331"/>
+            <a:ext cx="6093994" cy="369332"/>
           </a:xfrm>
           <a:prstGeom prst="rect">
             <a:avLst/>
@@ -5567,7 +5567,7 @@
           <a:p>
             <a:r>
               <a:rPr lang="en-GB" sz="1800" b="1" dirty="0"/>
-              <a:t>Execute the same code (MFL05.ino) in the motion creative board</a:t>
+              <a:t>Execute the same code in the motion creative board</a:t>
             </a:r>
           </a:p>
         </p:txBody>
@@ -5587,7 +5587,7 @@
         <p:spPr>
           <a:xfrm>
             <a:off x="479056" y="3241011"/>
-            <a:ext cx="4885191" cy="1200329"/>
+            <a:ext cx="5144997" cy="1200329"/>
           </a:xfrm>
           <a:prstGeom prst="rect">
             <a:avLst/>
@@ -5611,7 +5611,7 @@
               <a:rPr lang="en-GB" dirty="0">
                 <a:hlinkClick r:id="rId2"/>
               </a:rPr>
-              <a:t>https://github.com/info-zas/zas-robotics-motion/blob/main/01_FoundationProjects/MFL05/MFL05/MFL05.ino</a:t>
+              <a:t>https://github.com/info-zas/zas-robotics-motion/tree/main/01_FoundationProjects/MFL05_Accelerometer/MFL05_Accelerometer_MPU6050</a:t>
             </a:r>
             <a:endParaRPr lang="en-GB" dirty="0"/>
           </a:p>
@@ -5816,7 +5816,7 @@
         <p:spPr bwMode="auto">
           <a:xfrm>
             <a:off x="479056" y="2602026"/>
-            <a:ext cx="3783402" cy="369332"/>
+            <a:ext cx="4695110" cy="646331"/>
           </a:xfrm>
           <a:prstGeom prst="rect">
             <a:avLst/>
@@ -5928,7 +5928,7 @@
             </a:pPr>
             <a:r>
               <a:rPr lang="en-GB" b="1" dirty="0"/>
-              <a:t>Code for Lesson MFL05 (MFL05.ino):</a:t>
+              <a:t>Code for Lesson MFL05 (MFL05_Accelerometer_MPU6050.ino):</a:t>
             </a:r>
           </a:p>
         </p:txBody>
@@ -6000,7 +6000,7 @@
                 <a:ea typeface="Calibri Light" panose="020F0302020204030204" pitchFamily="34" charset="0"/>
                 <a:cs typeface="Calibri Light" panose="020F0302020204030204" pitchFamily="34" charset="0"/>
               </a:rPr>
-              <a:t>MFL05_a:</a:t>
+              <a:t>MFL05:</a:t>
             </a:r>
             <a:br>
               <a:rPr lang="en-GB" b="1" dirty="0">
@@ -6041,7 +6041,7 @@
         <p:spPr bwMode="auto">
           <a:xfrm>
             <a:off x="951005" y="5384007"/>
-            <a:ext cx="4378079" cy="1477328"/>
+            <a:ext cx="5144995" cy="1384995"/>
           </a:xfrm>
           <a:prstGeom prst="rect">
             <a:avLst/>
@@ -6157,8 +6157,8 @@
               <a:defRPr/>
             </a:pPr>
             <a:r>
-              <a:rPr lang="en-GB" b="1" dirty="0"/>
-              <a:t>Code for Lesson MFL05_a (MFL05_a.ino):</a:t>
+              <a:rPr lang="en-GB" sz="1400" b="1" dirty="0"/>
+              <a:t>Code for Lesson MFL05 (MFL05_Accelerometer_MPU6050_OLED.ino):</a:t>
             </a:r>
           </a:p>
           <a:p>
@@ -6166,18 +6166,18 @@
               <a:defRPr/>
             </a:pPr>
             <a:r>
-              <a:rPr lang="en-GB" b="1" dirty="0">
+              <a:rPr lang="en-GB" sz="1400" b="1" dirty="0">
                 <a:hlinkClick r:id="rId2"/>
               </a:rPr>
-              <a:t>https://github.com/info-zas/zas-robotics-motion/blob/main/01_FoundationProjects/MFL05/MFL05_a/MFL05_a.ino</a:t>
-            </a:r>
-            <a:endParaRPr lang="en-GB" b="1" dirty="0"/>
+              <a:t>https://github.com/info-zas/zas-robotics-motion/tree/main/01_FoundationProjects/MFL05_Accelerometer/MFL05_Accelerometer_MPU6050_OLED</a:t>
+            </a:r>
+            <a:endParaRPr lang="en-GB" sz="1400" b="1" dirty="0"/>
           </a:p>
           <a:p>
             <a:pPr>
               <a:defRPr/>
             </a:pPr>
-            <a:endParaRPr lang="en-GB" b="1" dirty="0"/>
+            <a:endParaRPr lang="en-GB" sz="1400" b="1" dirty="0"/>
           </a:p>
         </p:txBody>
       </p:sp>
